--- a/media/resources/files/Onduktar_Sandardy_iReettoo_KondumB.pptx
+++ b/media/resources/files/Onduktar_Sandardy_iReettoo_KondumB.pptx
@@ -15712,7 +15712,7 @@
                 <a:ea typeface="+mn-ea"/>
                 <a:cs typeface="+mn-cs"/>
               </a:rPr>
-              <a:t>Турдуу пикирлер учун ыраазычылык билдиребиз.</a:t>
+              <a:t>Түрдүү пикирлер үчүн ыраазычылык билдиребиз.</a:t>
             </a:r>
           </a:p>
           <a:p>

--- a/media/resources/files/Onduktar_Sandardy_iReettoo_KondumB.pptx
+++ b/media/resources/files/Onduktar_Sandardy_iReettoo_KondumB.pptx
@@ -1863,7 +1863,7 @@
               <a:pPr algn="ctr"/>
               <a:r>
                 <a:rPr lang="ky-KG" sz="1200" dirty="0"/>
-                <a:t>5.82 </a:t>
+                <a:t>5,82 </a:t>
               </a:r>
               <a:r>
                 <a:rPr lang="en-US" sz="1200" dirty="0"/>
@@ -2024,7 +2024,7 @@
               <a:pPr algn="ctr"/>
               <a:r>
                 <a:rPr lang="ky-KG" sz="1200" dirty="0"/>
-                <a:t>21.09</a:t>
+                <a:t>21,09</a:t>
               </a:r>
               <a:r>
                 <a:rPr lang="en-US" sz="1200" dirty="0"/>
@@ -2139,7 +2139,7 @@
               <a:pPr algn="ctr"/>
               <a:r>
                 <a:rPr lang="ky-KG" sz="1200" dirty="0"/>
-                <a:t>20.17</a:t>
+                <a:t>20,17</a:t>
               </a:r>
               <a:r>
                 <a:rPr lang="en-US" sz="1200" dirty="0"/>
@@ -2245,7 +2245,7 @@
               <a:pPr algn="ctr"/>
               <a:r>
                 <a:rPr lang="ky-KG" sz="1200" dirty="0"/>
-                <a:t>23.54</a:t>
+                <a:t>23,54</a:t>
               </a:r>
               <a:r>
                 <a:rPr lang="en-US" sz="1200" dirty="0"/>
@@ -2351,7 +2351,7 @@
               <a:pPr algn="ctr"/>
               <a:r>
                 <a:rPr lang="ky-KG" sz="1200" dirty="0"/>
-                <a:t>23.52 </a:t>
+                <a:t>23,52 </a:t>
               </a:r>
               <a:r>
                 <a:rPr lang="en-US" sz="1200" dirty="0"/>
@@ -2457,7 +2457,7 @@
               <a:pPr algn="ctr"/>
               <a:r>
                 <a:rPr lang="ky-KG" sz="1200" dirty="0"/>
-                <a:t>14.54$</a:t>
+                <a:t>14,54$</a:t>
               </a:r>
               <a:endParaRPr lang="en-GB" sz="1200" dirty="0"/>
             </a:p>
@@ -2567,7 +2567,7 @@
               <a:pPr algn="ctr"/>
               <a:r>
                 <a:rPr lang="ky-KG" sz="1200" dirty="0"/>
-                <a:t>28.15</a:t>
+                <a:t>28,15</a:t>
               </a:r>
               <a:r>
                 <a:rPr lang="en-US" sz="1200" dirty="0"/>
@@ -2682,7 +2682,7 @@
               <a:pPr algn="ctr"/>
               <a:r>
                 <a:rPr lang="ky-KG" sz="1200" dirty="0"/>
-                <a:t>23.67</a:t>
+                <a:t>23,67</a:t>
               </a:r>
               <a:r>
                 <a:rPr lang="en-US" sz="1200" dirty="0"/>
@@ -3229,7 +3229,7 @@
               <a:pPr algn="ctr"/>
               <a:r>
                 <a:rPr lang="ky-KG" sz="1200" dirty="0"/>
-                <a:t>5.82 </a:t>
+                <a:t>5,82 </a:t>
               </a:r>
               <a:r>
                 <a:rPr lang="en-US" sz="1200" dirty="0"/>
@@ -3390,7 +3390,7 @@
               <a:pPr algn="ctr"/>
               <a:r>
                 <a:rPr lang="ky-KG" sz="1200" dirty="0"/>
-                <a:t>21.09</a:t>
+                <a:t>21,09</a:t>
               </a:r>
               <a:r>
                 <a:rPr lang="en-US" sz="1200" dirty="0"/>
@@ -3505,7 +3505,7 @@
               <a:pPr algn="ctr"/>
               <a:r>
                 <a:rPr lang="ky-KG" sz="1200" dirty="0"/>
-                <a:t>20.17</a:t>
+                <a:t>20,17</a:t>
               </a:r>
               <a:r>
                 <a:rPr lang="en-US" sz="1200" dirty="0"/>
@@ -3611,7 +3611,7 @@
               <a:pPr algn="ctr"/>
               <a:r>
                 <a:rPr lang="ky-KG" sz="1200" dirty="0"/>
-                <a:t>23.54</a:t>
+                <a:t>23,54</a:t>
               </a:r>
               <a:r>
                 <a:rPr lang="en-US" sz="1200" dirty="0"/>
@@ -3717,7 +3717,7 @@
               <a:pPr algn="ctr"/>
               <a:r>
                 <a:rPr lang="ky-KG" sz="1200" dirty="0"/>
-                <a:t>23.52 </a:t>
+                <a:t>23,52 </a:t>
               </a:r>
               <a:r>
                 <a:rPr lang="en-US" sz="1200" dirty="0"/>
@@ -3823,7 +3823,7 @@
               <a:pPr algn="ctr"/>
               <a:r>
                 <a:rPr lang="ky-KG" sz="1200" dirty="0"/>
-                <a:t>14.54$</a:t>
+                <a:t>14,54$</a:t>
               </a:r>
               <a:endParaRPr lang="en-GB" sz="1200" dirty="0"/>
             </a:p>
@@ -3933,7 +3933,7 @@
               <a:pPr algn="ctr"/>
               <a:r>
                 <a:rPr lang="ky-KG" sz="1200" dirty="0"/>
-                <a:t>28.15</a:t>
+                <a:t>28,15</a:t>
               </a:r>
               <a:r>
                 <a:rPr lang="en-US" sz="1200" dirty="0"/>
@@ -4048,7 +4048,7 @@
               <a:pPr algn="ctr"/>
               <a:r>
                 <a:rPr lang="ky-KG" sz="1200" dirty="0"/>
-                <a:t>23.67</a:t>
+                <a:t>23,67</a:t>
               </a:r>
               <a:r>
                 <a:rPr lang="en-US" sz="1200" dirty="0"/>
@@ -4625,7 +4625,7 @@
               <a:pPr algn="ctr"/>
               <a:r>
                 <a:rPr lang="ky-KG" sz="1200" dirty="0"/>
-                <a:t>1.18 $</a:t>
+                <a:t>1,18 $</a:t>
               </a:r>
               <a:endParaRPr lang="en-GB" sz="1200" dirty="0"/>
             </a:p>
@@ -4796,7 +4796,7 @@
               <a:pPr algn="ctr"/>
               <a:r>
                 <a:rPr lang="ky-KG" sz="1200" dirty="0"/>
-                <a:t>1.10 $</a:t>
+                <a:t>1,10 $</a:t>
               </a:r>
               <a:endParaRPr lang="en-GB" sz="1200" dirty="0"/>
             </a:p>
@@ -4914,7 +4914,7 @@
               <a:pPr algn="ctr"/>
               <a:r>
                 <a:rPr lang="ky-KG" sz="1200" dirty="0"/>
-                <a:t>1.06 $</a:t>
+                <a:t>1,06 $</a:t>
               </a:r>
               <a:endParaRPr lang="en-GB" sz="1200" dirty="0"/>
             </a:p>
@@ -5032,7 +5032,7 @@
               <a:pPr algn="ctr"/>
               <a:r>
                 <a:rPr lang="ky-KG" sz="1200" dirty="0"/>
-                <a:t>1.78 </a:t>
+                <a:t>1,78 </a:t>
               </a:r>
               <a:r>
                 <a:rPr lang="en-US" sz="1200" dirty="0"/>
@@ -5154,7 +5154,7 @@
               <a:pPr algn="ctr"/>
               <a:r>
                 <a:rPr lang="ky-KG" sz="1200" dirty="0"/>
-                <a:t>2.09 $</a:t>
+                <a:t>2,09 $</a:t>
               </a:r>
               <a:endParaRPr lang="en-GB" sz="1200" dirty="0"/>
             </a:p>
@@ -5272,7 +5272,7 @@
               <a:pPr algn="ctr"/>
               <a:r>
                 <a:rPr lang="ky-KG" sz="1200" dirty="0"/>
-                <a:t>2.47 $</a:t>
+                <a:t>2,47 $</a:t>
               </a:r>
               <a:endParaRPr lang="en-GB" sz="1200" dirty="0"/>
             </a:p>
@@ -5390,7 +5390,7 @@
               <a:pPr algn="ctr"/>
               <a:r>
                 <a:rPr lang="ky-KG" sz="1200" dirty="0"/>
-                <a:t>2.51 </a:t>
+                <a:t>2,51 </a:t>
               </a:r>
               <a:r>
                 <a:rPr lang="en-US" sz="1200" dirty="0"/>
@@ -5512,7 +5512,7 @@
               <a:pPr algn="ctr"/>
               <a:r>
                 <a:rPr lang="ky-KG" sz="1200" dirty="0"/>
-                <a:t>1.85</a:t>
+                <a:t>1,85</a:t>
               </a:r>
               <a:r>
                 <a:rPr lang="en-US" sz="1200" dirty="0"/>
@@ -5634,7 +5634,7 @@
               <a:pPr algn="ctr"/>
               <a:r>
                 <a:rPr lang="ky-KG" sz="1200" dirty="0"/>
-                <a:t>1.82</a:t>
+                <a:t>1,82</a:t>
               </a:r>
               <a:r>
                 <a:rPr lang="en-US" sz="1200" dirty="0"/>
@@ -5756,7 +5756,7 @@
               <a:pPr algn="ctr"/>
               <a:r>
                 <a:rPr lang="ky-KG" sz="1200" dirty="0"/>
-                <a:t>1.77 $</a:t>
+                <a:t>1,77 $</a:t>
               </a:r>
               <a:endParaRPr lang="en-GB" sz="1200" dirty="0"/>
             </a:p>
@@ -5874,7 +5874,7 @@
               <a:pPr algn="ctr"/>
               <a:r>
                 <a:rPr lang="ky-KG" sz="1200" dirty="0"/>
-                <a:t>0.73 $</a:t>
+                <a:t>0,73 $</a:t>
               </a:r>
               <a:endParaRPr lang="en-GB" sz="1200" dirty="0"/>
             </a:p>
@@ -5992,7 +5992,7 @@
               <a:pPr algn="ctr"/>
               <a:r>
                 <a:rPr lang="ky-KG" sz="1200" dirty="0"/>
-                <a:t>2.42 $</a:t>
+                <a:t>2,42 $</a:t>
               </a:r>
               <a:endParaRPr lang="en-GB" sz="1200" dirty="0"/>
             </a:p>
@@ -6110,7 +6110,7 @@
               <a:pPr algn="ctr"/>
               <a:r>
                 <a:rPr lang="ky-KG" sz="1200" dirty="0"/>
-                <a:t>1.86 $</a:t>
+                <a:t>1,86 $</a:t>
               </a:r>
               <a:endParaRPr lang="en-GB" sz="1200" dirty="0"/>
             </a:p>
@@ -6228,7 +6228,7 @@
               <a:pPr algn="ctr"/>
               <a:r>
                 <a:rPr lang="ky-KG" sz="1200" dirty="0"/>
-                <a:t>2.44 $</a:t>
+                <a:t>2,44 $</a:t>
               </a:r>
               <a:endParaRPr lang="en-GB" sz="1200" dirty="0"/>
             </a:p>
@@ -6677,7 +6677,7 @@
               <a:pPr algn="ctr"/>
               <a:r>
                 <a:rPr lang="ky-KG" sz="1200" dirty="0"/>
-                <a:t>1.18 $</a:t>
+                <a:t>1,18 $</a:t>
               </a:r>
               <a:endParaRPr lang="en-GB" sz="1200" dirty="0"/>
             </a:p>
@@ -6848,7 +6848,7 @@
               <a:pPr algn="ctr"/>
               <a:r>
                 <a:rPr lang="ky-KG" sz="1200" dirty="0"/>
-                <a:t>1.10 $</a:t>
+                <a:t>1,10 $</a:t>
               </a:r>
               <a:endParaRPr lang="en-GB" sz="1200" dirty="0"/>
             </a:p>
@@ -6966,7 +6966,7 @@
               <a:pPr algn="ctr"/>
               <a:r>
                 <a:rPr lang="ky-KG" sz="1200" dirty="0"/>
-                <a:t>1.06 $</a:t>
+                <a:t>1,06 $</a:t>
               </a:r>
               <a:endParaRPr lang="en-GB" sz="1200" dirty="0"/>
             </a:p>
@@ -7084,7 +7084,7 @@
               <a:pPr algn="ctr"/>
               <a:r>
                 <a:rPr lang="ky-KG" sz="1200" dirty="0"/>
-                <a:t>1.78 </a:t>
+                <a:t>1,78 </a:t>
               </a:r>
               <a:r>
                 <a:rPr lang="en-US" sz="1200" dirty="0"/>
@@ -7206,7 +7206,7 @@
               <a:pPr algn="ctr"/>
               <a:r>
                 <a:rPr lang="ky-KG" sz="1200" dirty="0"/>
-                <a:t>2.09 $</a:t>
+                <a:t>2,09 $</a:t>
               </a:r>
               <a:endParaRPr lang="en-GB" sz="1200" dirty="0"/>
             </a:p>
@@ -7324,7 +7324,7 @@
               <a:pPr algn="ctr"/>
               <a:r>
                 <a:rPr lang="ky-KG" sz="1200" dirty="0"/>
-                <a:t>2.47 $</a:t>
+                <a:t>2,47 $</a:t>
               </a:r>
               <a:endParaRPr lang="en-GB" sz="1200" dirty="0"/>
             </a:p>
@@ -7442,7 +7442,7 @@
               <a:pPr algn="ctr"/>
               <a:r>
                 <a:rPr lang="ky-KG" sz="1200" dirty="0"/>
-                <a:t>2.51 </a:t>
+                <a:t>2,51 </a:t>
               </a:r>
               <a:r>
                 <a:rPr lang="en-US" sz="1200" dirty="0"/>
@@ -7564,7 +7564,7 @@
               <a:pPr algn="ctr"/>
               <a:r>
                 <a:rPr lang="ky-KG" sz="1200" dirty="0"/>
-                <a:t>1.85</a:t>
+                <a:t>1,85</a:t>
               </a:r>
               <a:r>
                 <a:rPr lang="en-US" sz="1200" dirty="0"/>
@@ -7686,7 +7686,7 @@
               <a:pPr algn="ctr"/>
               <a:r>
                 <a:rPr lang="ky-KG" sz="1200" dirty="0"/>
-                <a:t>1.82</a:t>
+                <a:t>1,82</a:t>
               </a:r>
               <a:r>
                 <a:rPr lang="en-US" sz="1200" dirty="0"/>
@@ -7808,7 +7808,7 @@
               <a:pPr algn="ctr"/>
               <a:r>
                 <a:rPr lang="ky-KG" sz="1200" dirty="0"/>
-                <a:t>1.77 $</a:t>
+                <a:t>1,77 $</a:t>
               </a:r>
               <a:endParaRPr lang="en-GB" sz="1200" dirty="0"/>
             </a:p>
@@ -7926,7 +7926,7 @@
               <a:pPr algn="ctr"/>
               <a:r>
                 <a:rPr lang="ky-KG" sz="1200" dirty="0"/>
-                <a:t>0.73 $</a:t>
+                <a:t>0,73 $</a:t>
               </a:r>
               <a:endParaRPr lang="en-GB" sz="1200" dirty="0"/>
             </a:p>
@@ -8044,7 +8044,7 @@
               <a:pPr algn="ctr"/>
               <a:r>
                 <a:rPr lang="ky-KG" sz="1200" dirty="0"/>
-                <a:t>2.42 $</a:t>
+                <a:t>2,42 $</a:t>
               </a:r>
               <a:endParaRPr lang="en-GB" sz="1200" dirty="0"/>
             </a:p>
@@ -8162,7 +8162,7 @@
               <a:pPr algn="ctr"/>
               <a:r>
                 <a:rPr lang="ky-KG" sz="1200" dirty="0"/>
-                <a:t>1.86 $</a:t>
+                <a:t>1,86 $</a:t>
               </a:r>
               <a:endParaRPr lang="en-GB" sz="1200" dirty="0"/>
             </a:p>
@@ -8280,7 +8280,7 @@
               <a:pPr algn="ctr"/>
               <a:r>
                 <a:rPr lang="ky-KG" sz="1200" dirty="0"/>
-                <a:t>2.44 $</a:t>
+                <a:t>2,44 $</a:t>
               </a:r>
               <a:endParaRPr lang="en-GB" sz="1200" dirty="0"/>
             </a:p>
@@ -8797,7 +8797,7 @@
               <a:pPr algn="ctr"/>
               <a:r>
                 <a:rPr lang="en-GB" sz="1200" dirty="0"/>
-                <a:t>10.6 </a:t>
+                <a:t>10,6 </a:t>
               </a:r>
               <a:r>
                 <a:rPr lang="ky-KG" sz="1200" dirty="0"/>
@@ -8913,7 +8913,7 @@
               <a:pPr algn="ctr"/>
               <a:r>
                 <a:rPr lang="en-GB" sz="1200" dirty="0"/>
-                <a:t>10.109 </a:t>
+                <a:t>10,109 </a:t>
               </a:r>
               <a:r>
                 <a:rPr lang="ky-KG" sz="1200" dirty="0"/>
@@ -9020,7 +9020,7 @@
               <a:pPr algn="ctr"/>
               <a:r>
                 <a:rPr lang="en-GB" sz="1200" dirty="0"/>
-                <a:t>10.507 </a:t>
+                <a:t>10,507 </a:t>
               </a:r>
               <a:r>
                 <a:rPr lang="ky-KG" sz="1200" dirty="0"/>
@@ -9127,7 +9127,7 @@
               <a:pPr algn="ctr"/>
               <a:r>
                 <a:rPr lang="en-GB" sz="1200" dirty="0"/>
-                <a:t>10.087 </a:t>
+                <a:t>10,087 </a:t>
               </a:r>
               <a:r>
                 <a:rPr lang="ky-KG" sz="1200" dirty="0"/>
@@ -9299,7 +9299,7 @@
               <a:pPr algn="ctr"/>
               <a:r>
                 <a:rPr lang="en-GB" sz="1200" dirty="0"/>
-                <a:t>10.54 </a:t>
+                <a:t>10,54 </a:t>
               </a:r>
               <a:r>
                 <a:rPr lang="ky-KG" sz="1200" dirty="0"/>
@@ -9415,7 +9415,7 @@
               <a:pPr algn="ctr"/>
               <a:r>
                 <a:rPr lang="en-GB" sz="1200" dirty="0"/>
-                <a:t>10.4 </a:t>
+                <a:t>10,4 </a:t>
               </a:r>
               <a:r>
                 <a:rPr lang="ky-KG" sz="1200" dirty="0"/>
@@ -9522,7 +9522,7 @@
               <a:pPr algn="ctr"/>
               <a:r>
                 <a:rPr lang="en-GB" sz="1200" dirty="0"/>
-                <a:t>10.419 </a:t>
+                <a:t>10,419 </a:t>
               </a:r>
               <a:r>
                 <a:rPr lang="ky-KG" sz="1200" dirty="0"/>
@@ -9629,7 +9629,7 @@
               <a:pPr algn="ctr"/>
               <a:r>
                 <a:rPr lang="en-GB" sz="1200" dirty="0"/>
-                <a:t>10.4417 </a:t>
+                <a:t>10,4417 </a:t>
               </a:r>
               <a:r>
                 <a:rPr lang="ky-KG" sz="1200" dirty="0"/>
@@ -9773,7 +9773,7 @@
               <a:pPr algn="ctr"/>
               <a:r>
                 <a:rPr lang="en-GB" sz="1200" dirty="0"/>
-                <a:t>10.1 </a:t>
+                <a:t>10,1 </a:t>
               </a:r>
               <a:r>
                 <a:rPr lang="ky-KG" sz="1200" dirty="0"/>
@@ -9880,7 +9880,7 @@
               <a:pPr algn="ctr"/>
               <a:r>
                 <a:rPr lang="en-GB" sz="1200" dirty="0"/>
-                <a:t>10.43 </a:t>
+                <a:t>10,43 </a:t>
               </a:r>
               <a:r>
                 <a:rPr lang="ky-KG" sz="1200" dirty="0"/>
@@ -9950,7 +9950,7 @@
               <a:pPr algn="ctr"/>
               <a:r>
                 <a:rPr lang="en-GB" sz="1200" dirty="0"/>
-                <a:t>10.5 </a:t>
+                <a:t>10,5 </a:t>
               </a:r>
               <a:r>
                 <a:rPr lang="ky-KG" sz="1200" dirty="0"/>
@@ -10375,7 +10375,7 @@
               <a:pPr algn="ctr"/>
               <a:r>
                 <a:rPr lang="en-GB" sz="1200" dirty="0"/>
-                <a:t>10.6 </a:t>
+                <a:t>10,6 </a:t>
               </a:r>
               <a:r>
                 <a:rPr lang="ky-KG" sz="1200" dirty="0"/>
@@ -10491,7 +10491,7 @@
               <a:pPr algn="ctr"/>
               <a:r>
                 <a:rPr lang="en-GB" sz="1200" dirty="0"/>
-                <a:t>10.109 </a:t>
+                <a:t>10,109 </a:t>
               </a:r>
               <a:r>
                 <a:rPr lang="ky-KG" sz="1200" dirty="0"/>
@@ -10598,7 +10598,7 @@
               <a:pPr algn="ctr"/>
               <a:r>
                 <a:rPr lang="en-GB" sz="1200" dirty="0"/>
-                <a:t>10.507 </a:t>
+                <a:t>10,507 </a:t>
               </a:r>
               <a:r>
                 <a:rPr lang="ky-KG" sz="1200" dirty="0"/>
@@ -10705,7 +10705,7 @@
               <a:pPr algn="ctr"/>
               <a:r>
                 <a:rPr lang="en-GB" sz="1200" dirty="0"/>
-                <a:t>10.087 </a:t>
+                <a:t>10,087 </a:t>
               </a:r>
               <a:r>
                 <a:rPr lang="ky-KG" sz="1200" dirty="0"/>
@@ -10877,7 +10877,7 @@
               <a:pPr algn="ctr"/>
               <a:r>
                 <a:rPr lang="en-GB" sz="1200" dirty="0"/>
-                <a:t>10.54 </a:t>
+                <a:t>10,54 </a:t>
               </a:r>
               <a:r>
                 <a:rPr lang="ky-KG" sz="1200" dirty="0"/>
@@ -10993,7 +10993,7 @@
               <a:pPr algn="ctr"/>
               <a:r>
                 <a:rPr lang="en-GB" sz="1200" dirty="0"/>
-                <a:t>10.4 </a:t>
+                <a:t>10,4 </a:t>
               </a:r>
               <a:r>
                 <a:rPr lang="ky-KG" sz="1200" dirty="0"/>
@@ -11100,7 +11100,7 @@
               <a:pPr algn="ctr"/>
               <a:r>
                 <a:rPr lang="en-GB" sz="1200" dirty="0"/>
-                <a:t>10.419 </a:t>
+                <a:t>10,419 </a:t>
               </a:r>
               <a:r>
                 <a:rPr lang="ky-KG" sz="1200" dirty="0"/>
@@ -11207,7 +11207,7 @@
               <a:pPr algn="ctr"/>
               <a:r>
                 <a:rPr lang="en-GB" sz="1200" dirty="0"/>
-                <a:t>10.4417 </a:t>
+                <a:t>10,4417 </a:t>
               </a:r>
               <a:r>
                 <a:rPr lang="ky-KG" sz="1200" dirty="0"/>
@@ -11351,7 +11351,7 @@
               <a:pPr algn="ctr"/>
               <a:r>
                 <a:rPr lang="en-GB" sz="1200" dirty="0"/>
-                <a:t>10.1 </a:t>
+                <a:t>10,1 </a:t>
               </a:r>
               <a:r>
                 <a:rPr lang="ky-KG" sz="1200" dirty="0"/>
@@ -11458,7 +11458,7 @@
               <a:pPr algn="ctr"/>
               <a:r>
                 <a:rPr lang="en-GB" sz="1200" dirty="0"/>
-                <a:t>10.43 </a:t>
+                <a:t>10,43 </a:t>
               </a:r>
               <a:r>
                 <a:rPr lang="ky-KG" sz="1200" dirty="0"/>
@@ -11528,7 +11528,7 @@
               <a:pPr algn="ctr"/>
               <a:r>
                 <a:rPr lang="en-GB" sz="1200" dirty="0"/>
-                <a:t>10.5 </a:t>
+                <a:t>10,5 </a:t>
               </a:r>
               <a:r>
                 <a:rPr lang="ky-KG" sz="1200" dirty="0"/>
@@ -11983,7 +11983,7 @@
               <a:pPr algn="ctr"/>
               <a:r>
                 <a:rPr lang="en-GB" sz="1200" dirty="0"/>
-                <a:t>7.1 </a:t>
+                <a:t>7,1 </a:t>
               </a:r>
               <a:r>
                 <a:rPr lang="ky-KG" sz="1200" dirty="0"/>
@@ -12099,7 +12099,7 @@
               <a:pPr algn="ctr"/>
               <a:r>
                 <a:rPr lang="en-GB" sz="1200" dirty="0"/>
-                <a:t>7.121 </a:t>
+                <a:t>7,121 </a:t>
               </a:r>
               <a:r>
                 <a:rPr lang="ky-KG" sz="1200" dirty="0"/>
@@ -12206,7 +12206,7 @@
               <a:pPr algn="ctr"/>
               <a:r>
                 <a:rPr lang="en-GB" sz="1200" dirty="0"/>
-                <a:t>7.21 </a:t>
+                <a:t>7,21 </a:t>
               </a:r>
               <a:r>
                 <a:rPr lang="ky-KG" sz="1200" dirty="0"/>
@@ -12313,7 +12313,7 @@
               <a:pPr algn="ctr"/>
               <a:r>
                 <a:rPr lang="en-GB" sz="1200" dirty="0"/>
-                <a:t>7.1205 </a:t>
+                <a:t>7,1205 </a:t>
               </a:r>
               <a:r>
                 <a:rPr lang="ky-KG" sz="1200" dirty="0"/>
@@ -12383,7 +12383,7 @@
               <a:pPr algn="ctr"/>
               <a:r>
                 <a:rPr lang="en-GB" sz="1200" dirty="0"/>
-                <a:t>7.108 </a:t>
+                <a:t>7,108 </a:t>
               </a:r>
               <a:r>
                 <a:rPr lang="ky-KG" sz="1200" dirty="0"/>
@@ -12490,7 +12490,7 @@
               <a:pPr algn="ctr"/>
               <a:r>
                 <a:rPr lang="en-GB" sz="1200" dirty="0"/>
-                <a:t>7.12 </a:t>
+                <a:t>7,12 </a:t>
               </a:r>
               <a:r>
                 <a:rPr lang="ky-KG" sz="1200" dirty="0"/>
@@ -12606,7 +12606,7 @@
               <a:pPr algn="ctr"/>
               <a:r>
                 <a:rPr lang="en-GB" sz="1200" dirty="0"/>
-                <a:t>7.126 </a:t>
+                <a:t>7,126 </a:t>
               </a:r>
               <a:r>
                 <a:rPr lang="ky-KG" sz="1200" dirty="0"/>
@@ -12713,7 +12713,7 @@
               <a:pPr algn="ctr"/>
               <a:r>
                 <a:rPr lang="en-GB" sz="1200" dirty="0"/>
-                <a:t>7.103 </a:t>
+                <a:t>7,103 </a:t>
               </a:r>
               <a:r>
                 <a:rPr lang="ky-KG" sz="1200" dirty="0"/>
@@ -12820,7 +12820,7 @@
               <a:pPr algn="ctr"/>
               <a:r>
                 <a:rPr lang="en-GB" sz="1200" dirty="0"/>
-                <a:t>7.105 </a:t>
+                <a:t>7,105 </a:t>
               </a:r>
               <a:r>
                 <a:rPr lang="ky-KG" sz="1200" dirty="0"/>
@@ -12964,7 +12964,7 @@
               <a:pPr algn="ctr"/>
               <a:r>
                 <a:rPr lang="en-GB" sz="1200" dirty="0"/>
-                <a:t>7.1253 </a:t>
+                <a:t>7,1253 </a:t>
               </a:r>
               <a:r>
                 <a:rPr lang="ky-KG" sz="1200" dirty="0"/>
@@ -13071,7 +13071,7 @@
               <a:pPr algn="ctr"/>
               <a:r>
                 <a:rPr lang="en-GB" sz="1200" dirty="0"/>
-                <a:t>7.125 </a:t>
+                <a:t>7,125 </a:t>
               </a:r>
               <a:r>
                 <a:rPr lang="ky-KG" sz="1200" dirty="0"/>
@@ -13141,7 +13141,7 @@
               <a:pPr algn="ctr"/>
               <a:r>
                 <a:rPr lang="en-GB" sz="1200" dirty="0"/>
-                <a:t>7.209 </a:t>
+                <a:t>7,209 </a:t>
               </a:r>
               <a:r>
                 <a:rPr lang="ky-KG" sz="1200" dirty="0"/>
@@ -13566,7 +13566,7 @@
               <a:pPr algn="ctr"/>
               <a:r>
                 <a:rPr lang="en-GB" sz="1200" dirty="0"/>
-                <a:t>7.1 </a:t>
+                <a:t>7,1 </a:t>
               </a:r>
               <a:r>
                 <a:rPr lang="ky-KG" sz="1200" dirty="0"/>
@@ -13682,7 +13682,7 @@
               <a:pPr algn="ctr"/>
               <a:r>
                 <a:rPr lang="en-GB" sz="1200" dirty="0"/>
-                <a:t>7.121 </a:t>
+                <a:t>7,121 </a:t>
               </a:r>
               <a:r>
                 <a:rPr lang="ky-KG" sz="1200" dirty="0"/>
@@ -13789,7 +13789,7 @@
               <a:pPr algn="ctr"/>
               <a:r>
                 <a:rPr lang="en-GB" sz="1200" dirty="0"/>
-                <a:t>7.21 </a:t>
+                <a:t>7,21 </a:t>
               </a:r>
               <a:r>
                 <a:rPr lang="ky-KG" sz="1200" dirty="0"/>
@@ -13896,7 +13896,7 @@
               <a:pPr algn="ctr"/>
               <a:r>
                 <a:rPr lang="en-GB" sz="1200" dirty="0"/>
-                <a:t>7.1205 </a:t>
+                <a:t>7,1205 </a:t>
               </a:r>
               <a:r>
                 <a:rPr lang="ky-KG" sz="1200" dirty="0"/>
@@ -13966,7 +13966,7 @@
               <a:pPr algn="ctr"/>
               <a:r>
                 <a:rPr lang="en-GB" sz="1200" dirty="0"/>
-                <a:t>7.108 </a:t>
+                <a:t>7,108 </a:t>
               </a:r>
               <a:r>
                 <a:rPr lang="ky-KG" sz="1200" dirty="0"/>
@@ -14073,7 +14073,7 @@
               <a:pPr algn="ctr"/>
               <a:r>
                 <a:rPr lang="en-GB" sz="1200" dirty="0"/>
-                <a:t>7.12 </a:t>
+                <a:t>7,12 </a:t>
               </a:r>
               <a:r>
                 <a:rPr lang="ky-KG" sz="1200" dirty="0"/>
@@ -14189,7 +14189,7 @@
               <a:pPr algn="ctr"/>
               <a:r>
                 <a:rPr lang="en-GB" sz="1200" dirty="0"/>
-                <a:t>7.126 </a:t>
+                <a:t>7,126 </a:t>
               </a:r>
               <a:r>
                 <a:rPr lang="ky-KG" sz="1200" dirty="0"/>
@@ -14296,7 +14296,7 @@
               <a:pPr algn="ctr"/>
               <a:r>
                 <a:rPr lang="en-GB" sz="1200" dirty="0"/>
-                <a:t>7.103 </a:t>
+                <a:t>7,103 </a:t>
               </a:r>
               <a:r>
                 <a:rPr lang="ky-KG" sz="1200" dirty="0"/>
@@ -14403,7 +14403,7 @@
               <a:pPr algn="ctr"/>
               <a:r>
                 <a:rPr lang="en-GB" sz="1200" dirty="0"/>
-                <a:t>7.105 </a:t>
+                <a:t>7,105 </a:t>
               </a:r>
               <a:r>
                 <a:rPr lang="ky-KG" sz="1200" dirty="0"/>
@@ -14547,7 +14547,7 @@
               <a:pPr algn="ctr"/>
               <a:r>
                 <a:rPr lang="en-GB" sz="1200" dirty="0"/>
-                <a:t>7.1253 </a:t>
+                <a:t>7,1253 </a:t>
               </a:r>
               <a:r>
                 <a:rPr lang="ky-KG" sz="1200" dirty="0"/>
@@ -14654,7 +14654,7 @@
               <a:pPr algn="ctr"/>
               <a:r>
                 <a:rPr lang="en-GB" sz="1200" dirty="0"/>
-                <a:t>7.125 </a:t>
+                <a:t>7,125 </a:t>
               </a:r>
               <a:r>
                 <a:rPr lang="ky-KG" sz="1200" dirty="0"/>
@@ -14724,7 +14724,7 @@
               <a:pPr algn="ctr"/>
               <a:r>
                 <a:rPr lang="en-GB" sz="1200" dirty="0"/>
-                <a:t>7.209 </a:t>
+                <a:t>7,209 </a:t>
               </a:r>
               <a:r>
                 <a:rPr lang="ky-KG" sz="1200" dirty="0"/>
@@ -15943,7 +15943,7 @@
               <a:pPr algn="ctr"/>
               <a:r>
                 <a:rPr lang="ky-KG" sz="1200" dirty="0"/>
-                <a:t>5.82 </a:t>
+                <a:t>5,82 </a:t>
               </a:r>
               <a:r>
                 <a:rPr lang="en-US" sz="1200" dirty="0"/>
@@ -16104,7 +16104,7 @@
               <a:pPr algn="ctr"/>
               <a:r>
                 <a:rPr lang="ky-KG" sz="1200" dirty="0"/>
-                <a:t>21.09</a:t>
+                <a:t>21,09</a:t>
               </a:r>
               <a:r>
                 <a:rPr lang="en-US" sz="1200" dirty="0"/>
@@ -16219,7 +16219,7 @@
               <a:pPr algn="ctr"/>
               <a:r>
                 <a:rPr lang="ky-KG" sz="1200" dirty="0"/>
-                <a:t>20.17</a:t>
+                <a:t>20,17</a:t>
               </a:r>
               <a:r>
                 <a:rPr lang="en-US" sz="1200" dirty="0"/>
@@ -16325,7 +16325,7 @@
               <a:pPr algn="ctr"/>
               <a:r>
                 <a:rPr lang="ky-KG" sz="1200" dirty="0"/>
-                <a:t>23.54</a:t>
+                <a:t>23,54</a:t>
               </a:r>
               <a:r>
                 <a:rPr lang="en-US" sz="1200" dirty="0"/>
@@ -16431,7 +16431,7 @@
               <a:pPr algn="ctr"/>
               <a:r>
                 <a:rPr lang="ky-KG" sz="1200" dirty="0"/>
-                <a:t>23.52 </a:t>
+                <a:t>23,52 </a:t>
               </a:r>
               <a:r>
                 <a:rPr lang="en-US" sz="1200" dirty="0"/>
@@ -16537,7 +16537,7 @@
               <a:pPr algn="ctr"/>
               <a:r>
                 <a:rPr lang="ky-KG" sz="1200" dirty="0"/>
-                <a:t>14.54$</a:t>
+                <a:t>14,54$</a:t>
               </a:r>
               <a:endParaRPr lang="en-GB" sz="1200" dirty="0"/>
             </a:p>
@@ -16647,7 +16647,7 @@
               <a:pPr algn="ctr"/>
               <a:r>
                 <a:rPr lang="ky-KG" sz="1200" dirty="0"/>
-                <a:t>28.15</a:t>
+                <a:t>28,15</a:t>
               </a:r>
               <a:r>
                 <a:rPr lang="en-US" sz="1200" dirty="0"/>
@@ -16762,7 +16762,7 @@
               <a:pPr algn="ctr"/>
               <a:r>
                 <a:rPr lang="ky-KG" sz="1200" dirty="0"/>
-                <a:t>23.67</a:t>
+                <a:t>23,67</a:t>
               </a:r>
               <a:r>
                 <a:rPr lang="en-US" sz="1200" dirty="0"/>
@@ -17339,7 +17339,7 @@
               <a:pPr algn="ctr"/>
               <a:r>
                 <a:rPr lang="ky-KG" sz="1200" dirty="0"/>
-                <a:t>1.18 $</a:t>
+                <a:t>1,18 $</a:t>
               </a:r>
               <a:endParaRPr lang="en-GB" sz="1200" dirty="0"/>
             </a:p>
@@ -17510,7 +17510,7 @@
               <a:pPr algn="ctr"/>
               <a:r>
                 <a:rPr lang="ky-KG" sz="1200" dirty="0"/>
-                <a:t>1.10 $</a:t>
+                <a:t>1,10 $</a:t>
               </a:r>
               <a:endParaRPr lang="en-GB" sz="1200" dirty="0"/>
             </a:p>
@@ -17628,7 +17628,7 @@
               <a:pPr algn="ctr"/>
               <a:r>
                 <a:rPr lang="ky-KG" sz="1200" dirty="0"/>
-                <a:t>1.06 $</a:t>
+                <a:t>1,06 $</a:t>
               </a:r>
               <a:endParaRPr lang="en-GB" sz="1200" dirty="0"/>
             </a:p>
@@ -17746,7 +17746,7 @@
               <a:pPr algn="ctr"/>
               <a:r>
                 <a:rPr lang="ky-KG" sz="1200" dirty="0"/>
-                <a:t>1.78 </a:t>
+                <a:t>1,78 </a:t>
               </a:r>
               <a:r>
                 <a:rPr lang="en-US" sz="1200" dirty="0"/>
@@ -17868,7 +17868,7 @@
               <a:pPr algn="ctr"/>
               <a:r>
                 <a:rPr lang="ky-KG" sz="1200" dirty="0"/>
-                <a:t>2.09 $</a:t>
+                <a:t>2,09 $</a:t>
               </a:r>
               <a:endParaRPr lang="en-GB" sz="1200" dirty="0"/>
             </a:p>
@@ -17986,7 +17986,7 @@
               <a:pPr algn="ctr"/>
               <a:r>
                 <a:rPr lang="ky-KG" sz="1200" dirty="0"/>
-                <a:t>2.47 $</a:t>
+                <a:t>2,47 $</a:t>
               </a:r>
               <a:endParaRPr lang="en-GB" sz="1200" dirty="0"/>
             </a:p>
@@ -18104,7 +18104,7 @@
               <a:pPr algn="ctr"/>
               <a:r>
                 <a:rPr lang="ky-KG" sz="1200" dirty="0"/>
-                <a:t>2.51 </a:t>
+                <a:t>2,51 </a:t>
               </a:r>
               <a:r>
                 <a:rPr lang="en-US" sz="1200" dirty="0"/>
@@ -18226,7 +18226,7 @@
               <a:pPr algn="ctr"/>
               <a:r>
                 <a:rPr lang="ky-KG" sz="1200" dirty="0"/>
-                <a:t>1.85</a:t>
+                <a:t>1,85</a:t>
               </a:r>
               <a:r>
                 <a:rPr lang="en-US" sz="1200" dirty="0"/>
@@ -18348,7 +18348,7 @@
               <a:pPr algn="ctr"/>
               <a:r>
                 <a:rPr lang="ky-KG" sz="1200" dirty="0"/>
-                <a:t>1.82</a:t>
+                <a:t>1,82</a:t>
               </a:r>
               <a:r>
                 <a:rPr lang="en-US" sz="1200" dirty="0"/>
@@ -18470,7 +18470,7 @@
               <a:pPr algn="ctr"/>
               <a:r>
                 <a:rPr lang="ky-KG" sz="1200" dirty="0"/>
-                <a:t>1.77 $</a:t>
+                <a:t>1,77 $</a:t>
               </a:r>
               <a:endParaRPr lang="en-GB" sz="1200" dirty="0"/>
             </a:p>
@@ -18588,7 +18588,7 @@
               <a:pPr algn="ctr"/>
               <a:r>
                 <a:rPr lang="ky-KG" sz="1200" dirty="0"/>
-                <a:t>0.73 $</a:t>
+                <a:t>0,73 $</a:t>
               </a:r>
               <a:endParaRPr lang="en-GB" sz="1200" dirty="0"/>
             </a:p>
@@ -18706,7 +18706,7 @@
               <a:pPr algn="ctr"/>
               <a:r>
                 <a:rPr lang="ky-KG" sz="1200" dirty="0"/>
-                <a:t>2.42 $</a:t>
+                <a:t>2,42 $</a:t>
               </a:r>
               <a:endParaRPr lang="en-GB" sz="1200" dirty="0"/>
             </a:p>
@@ -18824,7 +18824,7 @@
               <a:pPr algn="ctr"/>
               <a:r>
                 <a:rPr lang="ky-KG" sz="1200" dirty="0"/>
-                <a:t>1.86 $</a:t>
+                <a:t>1,86 $</a:t>
               </a:r>
               <a:endParaRPr lang="en-GB" sz="1200" dirty="0"/>
             </a:p>
@@ -18942,7 +18942,7 @@
               <a:pPr algn="ctr"/>
               <a:r>
                 <a:rPr lang="ky-KG" sz="1200" dirty="0"/>
-                <a:t>2.44 $</a:t>
+                <a:t>2,44 $</a:t>
               </a:r>
               <a:endParaRPr lang="en-GB" sz="1200" dirty="0"/>
             </a:p>
@@ -19459,7 +19459,7 @@
               <a:pPr algn="ctr"/>
               <a:r>
                 <a:rPr lang="en-GB" sz="1200" dirty="0"/>
-                <a:t>10.6 </a:t>
+                <a:t>10,6 </a:t>
               </a:r>
               <a:r>
                 <a:rPr lang="ky-KG" sz="1200" dirty="0"/>
@@ -19575,7 +19575,7 @@
               <a:pPr algn="ctr"/>
               <a:r>
                 <a:rPr lang="en-GB" sz="1200" dirty="0"/>
-                <a:t>10.109 </a:t>
+                <a:t>10,109 </a:t>
               </a:r>
               <a:r>
                 <a:rPr lang="ky-KG" sz="1200" dirty="0"/>
@@ -19682,7 +19682,7 @@
               <a:pPr algn="ctr"/>
               <a:r>
                 <a:rPr lang="en-GB" sz="1200" dirty="0"/>
-                <a:t>10.507 </a:t>
+                <a:t>10,507 </a:t>
               </a:r>
               <a:r>
                 <a:rPr lang="ky-KG" sz="1200" dirty="0"/>
@@ -19789,7 +19789,7 @@
               <a:pPr algn="ctr"/>
               <a:r>
                 <a:rPr lang="en-GB" sz="1200" dirty="0"/>
-                <a:t>10.087 </a:t>
+                <a:t>10,087 </a:t>
               </a:r>
               <a:r>
                 <a:rPr lang="ky-KG" sz="1200" dirty="0"/>
@@ -19961,7 +19961,7 @@
               <a:pPr algn="ctr"/>
               <a:r>
                 <a:rPr lang="en-GB" sz="1200" dirty="0"/>
-                <a:t>10.54 </a:t>
+                <a:t>10,54 </a:t>
               </a:r>
               <a:r>
                 <a:rPr lang="ky-KG" sz="1200" dirty="0"/>
@@ -20077,7 +20077,7 @@
               <a:pPr algn="ctr"/>
               <a:r>
                 <a:rPr lang="en-GB" sz="1200" dirty="0"/>
-                <a:t>10.4 </a:t>
+                <a:t>10,4 </a:t>
               </a:r>
               <a:r>
                 <a:rPr lang="ky-KG" sz="1200" dirty="0"/>
@@ -20184,7 +20184,7 @@
               <a:pPr algn="ctr"/>
               <a:r>
                 <a:rPr lang="en-GB" sz="1200" dirty="0"/>
-                <a:t>10.419 </a:t>
+                <a:t>10,419 </a:t>
               </a:r>
               <a:r>
                 <a:rPr lang="ky-KG" sz="1200" dirty="0"/>
@@ -20291,7 +20291,7 @@
               <a:pPr algn="ctr"/>
               <a:r>
                 <a:rPr lang="en-GB" sz="1200" dirty="0"/>
-                <a:t>10.4417 </a:t>
+                <a:t>10,4417 </a:t>
               </a:r>
               <a:r>
                 <a:rPr lang="ky-KG" sz="1200" dirty="0"/>
@@ -20435,7 +20435,7 @@
               <a:pPr algn="ctr"/>
               <a:r>
                 <a:rPr lang="en-GB" sz="1200" dirty="0"/>
-                <a:t>10.1 </a:t>
+                <a:t>10,1 </a:t>
               </a:r>
               <a:r>
                 <a:rPr lang="ky-KG" sz="1200" dirty="0"/>
@@ -20542,7 +20542,7 @@
               <a:pPr algn="ctr"/>
               <a:r>
                 <a:rPr lang="en-GB" sz="1200" dirty="0"/>
-                <a:t>10.43 </a:t>
+                <a:t>10,43 </a:t>
               </a:r>
               <a:r>
                 <a:rPr lang="ky-KG" sz="1200" dirty="0"/>
@@ -20612,7 +20612,7 @@
               <a:pPr algn="ctr"/>
               <a:r>
                 <a:rPr lang="en-GB" sz="1200" dirty="0"/>
-                <a:t>10.5 </a:t>
+                <a:t>10,5 </a:t>
               </a:r>
               <a:r>
                 <a:rPr lang="ky-KG" sz="1200" dirty="0"/>
@@ -21067,7 +21067,7 @@
               <a:pPr algn="ctr"/>
               <a:r>
                 <a:rPr lang="en-GB" sz="1200" dirty="0"/>
-                <a:t>7.1 </a:t>
+                <a:t>7,1 </a:t>
               </a:r>
               <a:r>
                 <a:rPr lang="ky-KG" sz="1200" dirty="0"/>
@@ -21183,7 +21183,7 @@
               <a:pPr algn="ctr"/>
               <a:r>
                 <a:rPr lang="en-GB" sz="1200" dirty="0"/>
-                <a:t>7.121 </a:t>
+                <a:t>7,121 </a:t>
               </a:r>
               <a:r>
                 <a:rPr lang="ky-KG" sz="1200" dirty="0"/>
@@ -21290,7 +21290,7 @@
               <a:pPr algn="ctr"/>
               <a:r>
                 <a:rPr lang="en-GB" sz="1200" dirty="0"/>
-                <a:t>7.21 </a:t>
+                <a:t>7,21 </a:t>
               </a:r>
               <a:r>
                 <a:rPr lang="ky-KG" sz="1200" dirty="0"/>
@@ -21397,7 +21397,7 @@
               <a:pPr algn="ctr"/>
               <a:r>
                 <a:rPr lang="en-GB" sz="1200" dirty="0"/>
-                <a:t>7.1205 </a:t>
+                <a:t>7,1205 </a:t>
               </a:r>
               <a:r>
                 <a:rPr lang="ky-KG" sz="1200" dirty="0"/>
@@ -21467,7 +21467,7 @@
               <a:pPr algn="ctr"/>
               <a:r>
                 <a:rPr lang="en-GB" sz="1200" dirty="0"/>
-                <a:t>7.108 </a:t>
+                <a:t>7,108 </a:t>
               </a:r>
               <a:r>
                 <a:rPr lang="ky-KG" sz="1200" dirty="0"/>
@@ -21574,7 +21574,7 @@
               <a:pPr algn="ctr"/>
               <a:r>
                 <a:rPr lang="en-GB" sz="1200" dirty="0"/>
-                <a:t>7.12 </a:t>
+                <a:t>7,12 </a:t>
               </a:r>
               <a:r>
                 <a:rPr lang="ky-KG" sz="1200" dirty="0"/>
@@ -21690,7 +21690,7 @@
               <a:pPr algn="ctr"/>
               <a:r>
                 <a:rPr lang="en-GB" sz="1200" dirty="0"/>
-                <a:t>7.126 </a:t>
+                <a:t>7,126 </a:t>
               </a:r>
               <a:r>
                 <a:rPr lang="ky-KG" sz="1200" dirty="0"/>
@@ -21797,7 +21797,7 @@
               <a:pPr algn="ctr"/>
               <a:r>
                 <a:rPr lang="en-GB" sz="1200" dirty="0"/>
-                <a:t>7.103 </a:t>
+                <a:t>7,103 </a:t>
               </a:r>
               <a:r>
                 <a:rPr lang="ky-KG" sz="1200" dirty="0"/>
@@ -21904,7 +21904,7 @@
               <a:pPr algn="ctr"/>
               <a:r>
                 <a:rPr lang="en-GB" sz="1200" dirty="0"/>
-                <a:t>7.105 </a:t>
+                <a:t>7,105 </a:t>
               </a:r>
               <a:r>
                 <a:rPr lang="ky-KG" sz="1200" dirty="0"/>
@@ -22048,7 +22048,7 @@
               <a:pPr algn="ctr"/>
               <a:r>
                 <a:rPr lang="en-GB" sz="1200" dirty="0"/>
-                <a:t>7.1253 </a:t>
+                <a:t>7,1253 </a:t>
               </a:r>
               <a:r>
                 <a:rPr lang="ky-KG" sz="1200" dirty="0"/>
@@ -22155,7 +22155,7 @@
               <a:pPr algn="ctr"/>
               <a:r>
                 <a:rPr lang="en-GB" sz="1200" dirty="0"/>
-                <a:t>7.125 </a:t>
+                <a:t>7,125 </a:t>
               </a:r>
               <a:r>
                 <a:rPr lang="ky-KG" sz="1200" dirty="0"/>
@@ -22225,7 +22225,7 @@
               <a:pPr algn="ctr"/>
               <a:r>
                 <a:rPr lang="en-GB" sz="1200" dirty="0"/>
-                <a:t>7.209 </a:t>
+                <a:t>7,209 </a:t>
               </a:r>
               <a:r>
                 <a:rPr lang="ky-KG" sz="1200" dirty="0"/>
@@ -22642,7 +22642,7 @@
               <a:pPr algn="ctr"/>
               <a:r>
                 <a:rPr lang="ky-KG" sz="1200" dirty="0"/>
-                <a:t>5.82 </a:t>
+                <a:t>5,82 </a:t>
               </a:r>
               <a:r>
                 <a:rPr lang="en-US" sz="1200" dirty="0"/>
@@ -22803,7 +22803,7 @@
               <a:pPr algn="ctr"/>
               <a:r>
                 <a:rPr lang="ky-KG" sz="1200" dirty="0"/>
-                <a:t>21.09</a:t>
+                <a:t>21,09</a:t>
               </a:r>
               <a:r>
                 <a:rPr lang="en-US" sz="1200" dirty="0"/>
@@ -22918,7 +22918,7 @@
               <a:pPr algn="ctr"/>
               <a:r>
                 <a:rPr lang="ky-KG" sz="1200" dirty="0"/>
-                <a:t>20.17</a:t>
+                <a:t>20,17</a:t>
               </a:r>
               <a:r>
                 <a:rPr lang="en-US" sz="1200" dirty="0"/>
@@ -23024,7 +23024,7 @@
               <a:pPr algn="ctr"/>
               <a:r>
                 <a:rPr lang="ky-KG" sz="1200" dirty="0"/>
-                <a:t>23.54</a:t>
+                <a:t>23,54</a:t>
               </a:r>
               <a:r>
                 <a:rPr lang="en-US" sz="1200" dirty="0"/>
@@ -23130,7 +23130,7 @@
               <a:pPr algn="ctr"/>
               <a:r>
                 <a:rPr lang="ky-KG" sz="1200" dirty="0"/>
-                <a:t>23.52 </a:t>
+                <a:t>23,52 </a:t>
               </a:r>
               <a:r>
                 <a:rPr lang="en-US" sz="1200" dirty="0"/>
@@ -23236,7 +23236,7 @@
               <a:pPr algn="ctr"/>
               <a:r>
                 <a:rPr lang="ky-KG" sz="1200" dirty="0"/>
-                <a:t>14.54$</a:t>
+                <a:t>14,54$</a:t>
               </a:r>
               <a:endParaRPr lang="en-GB" sz="1200" dirty="0"/>
             </a:p>
@@ -23346,7 +23346,7 @@
               <a:pPr algn="ctr"/>
               <a:r>
                 <a:rPr lang="ky-KG" sz="1200" dirty="0"/>
-                <a:t>28.15</a:t>
+                <a:t>28,15</a:t>
               </a:r>
               <a:r>
                 <a:rPr lang="en-US" sz="1200" dirty="0"/>
@@ -23461,7 +23461,7 @@
               <a:pPr algn="ctr"/>
               <a:r>
                 <a:rPr lang="ky-KG" sz="1200" dirty="0"/>
-                <a:t>23.67</a:t>
+                <a:t>23,67</a:t>
               </a:r>
               <a:r>
                 <a:rPr lang="en-US" sz="1200" dirty="0"/>
@@ -24038,7 +24038,7 @@
               <a:pPr algn="ctr"/>
               <a:r>
                 <a:rPr lang="ky-KG" sz="1200" dirty="0"/>
-                <a:t>1.18 $</a:t>
+                <a:t>1,18 $</a:t>
               </a:r>
               <a:endParaRPr lang="en-GB" sz="1200" dirty="0"/>
             </a:p>
@@ -24209,7 +24209,7 @@
               <a:pPr algn="ctr"/>
               <a:r>
                 <a:rPr lang="ky-KG" sz="1200" dirty="0"/>
-                <a:t>1.10 $</a:t>
+                <a:t>1,10 $</a:t>
               </a:r>
               <a:endParaRPr lang="en-GB" sz="1200" dirty="0"/>
             </a:p>
@@ -24327,7 +24327,7 @@
               <a:pPr algn="ctr"/>
               <a:r>
                 <a:rPr lang="ky-KG" sz="1200" dirty="0"/>
-                <a:t>1.06 $</a:t>
+                <a:t>1,06 $</a:t>
               </a:r>
               <a:endParaRPr lang="en-GB" sz="1200" dirty="0"/>
             </a:p>
@@ -24445,7 +24445,7 @@
               <a:pPr algn="ctr"/>
               <a:r>
                 <a:rPr lang="ky-KG" sz="1200" dirty="0"/>
-                <a:t>1.78 </a:t>
+                <a:t>1,78 </a:t>
               </a:r>
               <a:r>
                 <a:rPr lang="en-US" sz="1200" dirty="0"/>
@@ -24567,7 +24567,7 @@
               <a:pPr algn="ctr"/>
               <a:r>
                 <a:rPr lang="ky-KG" sz="1200" dirty="0"/>
-                <a:t>2.09 $</a:t>
+                <a:t>2,09 $</a:t>
               </a:r>
               <a:endParaRPr lang="en-GB" sz="1200" dirty="0"/>
             </a:p>
@@ -24685,7 +24685,7 @@
               <a:pPr algn="ctr"/>
               <a:r>
                 <a:rPr lang="ky-KG" sz="1200" dirty="0"/>
-                <a:t>2.47 $</a:t>
+                <a:t>2,47 $</a:t>
               </a:r>
               <a:endParaRPr lang="en-GB" sz="1200" dirty="0"/>
             </a:p>
@@ -24803,7 +24803,7 @@
               <a:pPr algn="ctr"/>
               <a:r>
                 <a:rPr lang="ky-KG" sz="1200" dirty="0"/>
-                <a:t>2.51 </a:t>
+                <a:t>2,51 </a:t>
               </a:r>
               <a:r>
                 <a:rPr lang="en-US" sz="1200" dirty="0"/>
@@ -24925,7 +24925,7 @@
               <a:pPr algn="ctr"/>
               <a:r>
                 <a:rPr lang="ky-KG" sz="1200" dirty="0"/>
-                <a:t>1.85</a:t>
+                <a:t>1,85</a:t>
               </a:r>
               <a:r>
                 <a:rPr lang="en-US" sz="1200" dirty="0"/>
@@ -25047,7 +25047,7 @@
               <a:pPr algn="ctr"/>
               <a:r>
                 <a:rPr lang="ky-KG" sz="1200" dirty="0"/>
-                <a:t>1.82</a:t>
+                <a:t>1,82</a:t>
               </a:r>
               <a:r>
                 <a:rPr lang="en-US" sz="1200" dirty="0"/>
@@ -25169,7 +25169,7 @@
               <a:pPr algn="ctr"/>
               <a:r>
                 <a:rPr lang="ky-KG" sz="1200" dirty="0"/>
-                <a:t>1.77 $</a:t>
+                <a:t>1,77 $</a:t>
               </a:r>
               <a:endParaRPr lang="en-GB" sz="1200" dirty="0"/>
             </a:p>
@@ -25287,7 +25287,7 @@
               <a:pPr algn="ctr"/>
               <a:r>
                 <a:rPr lang="ky-KG" sz="1200" dirty="0"/>
-                <a:t>0.73 $</a:t>
+                <a:t>0,73 $</a:t>
               </a:r>
               <a:endParaRPr lang="en-GB" sz="1200" dirty="0"/>
             </a:p>
@@ -25405,7 +25405,7 @@
               <a:pPr algn="ctr"/>
               <a:r>
                 <a:rPr lang="ky-KG" sz="1200" dirty="0"/>
-                <a:t>2.42 $</a:t>
+                <a:t>2,42 $</a:t>
               </a:r>
               <a:endParaRPr lang="en-GB" sz="1200" dirty="0"/>
             </a:p>
@@ -25523,7 +25523,7 @@
               <a:pPr algn="ctr"/>
               <a:r>
                 <a:rPr lang="ky-KG" sz="1200" dirty="0"/>
-                <a:t>1.86 $</a:t>
+                <a:t>1,86 $</a:t>
               </a:r>
               <a:endParaRPr lang="en-GB" sz="1200" dirty="0"/>
             </a:p>
@@ -25641,7 +25641,7 @@
               <a:pPr algn="ctr"/>
               <a:r>
                 <a:rPr lang="ky-KG" sz="1200" dirty="0"/>
-                <a:t>2.44 $</a:t>
+                <a:t>2,44 $</a:t>
               </a:r>
               <a:endParaRPr lang="en-GB" sz="1200" dirty="0"/>
             </a:p>
@@ -26158,7 +26158,7 @@
               <a:pPr algn="ctr"/>
               <a:r>
                 <a:rPr lang="en-GB" sz="1200" dirty="0"/>
-                <a:t>10.6 </a:t>
+                <a:t>10,6 </a:t>
               </a:r>
               <a:r>
                 <a:rPr lang="ky-KG" sz="1200" dirty="0"/>
@@ -26274,7 +26274,7 @@
               <a:pPr algn="ctr"/>
               <a:r>
                 <a:rPr lang="en-GB" sz="1200" dirty="0"/>
-                <a:t>10.109 </a:t>
+                <a:t>10,109 </a:t>
               </a:r>
               <a:r>
                 <a:rPr lang="ky-KG" sz="1200" dirty="0"/>
@@ -26381,7 +26381,7 @@
               <a:pPr algn="ctr"/>
               <a:r>
                 <a:rPr lang="en-GB" sz="1200" dirty="0"/>
-                <a:t>10.507 </a:t>
+                <a:t>10,507 </a:t>
               </a:r>
               <a:r>
                 <a:rPr lang="ky-KG" sz="1200" dirty="0"/>
@@ -26488,7 +26488,7 @@
               <a:pPr algn="ctr"/>
               <a:r>
                 <a:rPr lang="en-GB" sz="1200" dirty="0"/>
-                <a:t>10.087 </a:t>
+                <a:t>10,087 </a:t>
               </a:r>
               <a:r>
                 <a:rPr lang="ky-KG" sz="1200" dirty="0"/>
@@ -26660,7 +26660,7 @@
               <a:pPr algn="ctr"/>
               <a:r>
                 <a:rPr lang="en-GB" sz="1200" dirty="0"/>
-                <a:t>10.54 </a:t>
+                <a:t>10,54 </a:t>
               </a:r>
               <a:r>
                 <a:rPr lang="ky-KG" sz="1200" dirty="0"/>
@@ -26776,7 +26776,7 @@
               <a:pPr algn="ctr"/>
               <a:r>
                 <a:rPr lang="en-GB" sz="1200" dirty="0"/>
-                <a:t>10.4 </a:t>
+                <a:t>10,4 </a:t>
               </a:r>
               <a:r>
                 <a:rPr lang="ky-KG" sz="1200" dirty="0"/>
@@ -26883,7 +26883,7 @@
               <a:pPr algn="ctr"/>
               <a:r>
                 <a:rPr lang="en-GB" sz="1200" dirty="0"/>
-                <a:t>10.419 </a:t>
+                <a:t>10,419 </a:t>
               </a:r>
               <a:r>
                 <a:rPr lang="ky-KG" sz="1200" dirty="0"/>
@@ -26990,7 +26990,7 @@
               <a:pPr algn="ctr"/>
               <a:r>
                 <a:rPr lang="en-GB" sz="1200" dirty="0"/>
-                <a:t>10.4417 </a:t>
+                <a:t>10,4417 </a:t>
               </a:r>
               <a:r>
                 <a:rPr lang="ky-KG" sz="1200" dirty="0"/>
@@ -27134,7 +27134,7 @@
               <a:pPr algn="ctr"/>
               <a:r>
                 <a:rPr lang="en-GB" sz="1200" dirty="0"/>
-                <a:t>10.1 </a:t>
+                <a:t>10,1 </a:t>
               </a:r>
               <a:r>
                 <a:rPr lang="ky-KG" sz="1200" dirty="0"/>
@@ -27241,7 +27241,7 @@
               <a:pPr algn="ctr"/>
               <a:r>
                 <a:rPr lang="en-GB" sz="1200" dirty="0"/>
-                <a:t>10.43 </a:t>
+                <a:t>10,43 </a:t>
               </a:r>
               <a:r>
                 <a:rPr lang="ky-KG" sz="1200" dirty="0"/>
@@ -27311,7 +27311,7 @@
               <a:pPr algn="ctr"/>
               <a:r>
                 <a:rPr lang="en-GB" sz="1200" dirty="0"/>
-                <a:t>10.5 </a:t>
+                <a:t>10,5 </a:t>
               </a:r>
               <a:r>
                 <a:rPr lang="ky-KG" sz="1200" dirty="0"/>
@@ -27766,7 +27766,7 @@
               <a:pPr algn="ctr"/>
               <a:r>
                 <a:rPr lang="en-GB" sz="1200" dirty="0"/>
-                <a:t>7.1 </a:t>
+                <a:t>7,1 </a:t>
               </a:r>
               <a:r>
                 <a:rPr lang="ky-KG" sz="1200" dirty="0"/>
@@ -27882,7 +27882,7 @@
               <a:pPr algn="ctr"/>
               <a:r>
                 <a:rPr lang="en-GB" sz="1200" dirty="0"/>
-                <a:t>7.121 </a:t>
+                <a:t>7,121 </a:t>
               </a:r>
               <a:r>
                 <a:rPr lang="ky-KG" sz="1200" dirty="0"/>
@@ -27989,7 +27989,7 @@
               <a:pPr algn="ctr"/>
               <a:r>
                 <a:rPr lang="en-GB" sz="1200" dirty="0"/>
-                <a:t>7.21 </a:t>
+                <a:t>7,21 </a:t>
               </a:r>
               <a:r>
                 <a:rPr lang="ky-KG" sz="1200" dirty="0"/>
@@ -28096,7 +28096,7 @@
               <a:pPr algn="ctr"/>
               <a:r>
                 <a:rPr lang="en-GB" sz="1200" dirty="0"/>
-                <a:t>7.1205 </a:t>
+                <a:t>7,1205 </a:t>
               </a:r>
               <a:r>
                 <a:rPr lang="ky-KG" sz="1200" dirty="0"/>
@@ -28166,7 +28166,7 @@
               <a:pPr algn="ctr"/>
               <a:r>
                 <a:rPr lang="en-GB" sz="1200" dirty="0"/>
-                <a:t>7.108 </a:t>
+                <a:t>7,108 </a:t>
               </a:r>
               <a:r>
                 <a:rPr lang="ky-KG" sz="1200" dirty="0"/>
@@ -28273,7 +28273,7 @@
               <a:pPr algn="ctr"/>
               <a:r>
                 <a:rPr lang="en-GB" sz="1200" dirty="0"/>
-                <a:t>7.12 </a:t>
+                <a:t>7,12 </a:t>
               </a:r>
               <a:r>
                 <a:rPr lang="ky-KG" sz="1200" dirty="0"/>
@@ -28389,7 +28389,7 @@
               <a:pPr algn="ctr"/>
               <a:r>
                 <a:rPr lang="en-GB" sz="1200" dirty="0"/>
-                <a:t>7.126 </a:t>
+                <a:t>7,126 </a:t>
               </a:r>
               <a:r>
                 <a:rPr lang="ky-KG" sz="1200" dirty="0"/>
@@ -28496,7 +28496,7 @@
               <a:pPr algn="ctr"/>
               <a:r>
                 <a:rPr lang="en-GB" sz="1200" dirty="0"/>
-                <a:t>7.103 </a:t>
+                <a:t>7,103 </a:t>
               </a:r>
               <a:r>
                 <a:rPr lang="ky-KG" sz="1200" dirty="0"/>
@@ -28603,7 +28603,7 @@
               <a:pPr algn="ctr"/>
               <a:r>
                 <a:rPr lang="en-GB" sz="1200" dirty="0"/>
-                <a:t>7.105 </a:t>
+                <a:t>7,105 </a:t>
               </a:r>
               <a:r>
                 <a:rPr lang="ky-KG" sz="1200" dirty="0"/>
@@ -28747,7 +28747,7 @@
               <a:pPr algn="ctr"/>
               <a:r>
                 <a:rPr lang="en-GB" sz="1200" dirty="0"/>
-                <a:t>7.1253 </a:t>
+                <a:t>7,1253 </a:t>
               </a:r>
               <a:r>
                 <a:rPr lang="ky-KG" sz="1200" dirty="0"/>
@@ -28854,7 +28854,7 @@
               <a:pPr algn="ctr"/>
               <a:r>
                 <a:rPr lang="en-GB" sz="1200" dirty="0"/>
-                <a:t>7.125 </a:t>
+                <a:t>7,125 </a:t>
               </a:r>
               <a:r>
                 <a:rPr lang="ky-KG" sz="1200" dirty="0"/>
@@ -28924,7 +28924,7 @@
               <a:pPr algn="ctr"/>
               <a:r>
                 <a:rPr lang="en-GB" sz="1200" dirty="0"/>
-                <a:t>7.209 </a:t>
+                <a:t>7,209 </a:t>
               </a:r>
               <a:r>
                 <a:rPr lang="ky-KG" sz="1200" dirty="0"/>
